--- a/report/86_Dynamic_Timetable_Monitoring_System/poster/86_Dynamic_Timetable_Poster.pptx
+++ b/report/86_Dynamic_Timetable_Monitoring_System/poster/86_Dynamic_Timetable_Poster.pptx
@@ -1376,7 +1376,7 @@
                 <a:latin typeface="Bookman Old Style"/>
                 <a:ea typeface="Times New Roman"/>
               </a:rPr>
-              <a:t>Shivam Mulani, Member 2 Name, Member 3 Name, Member 4 Name, B.Tech.(Comp.)</a:t>
+              <a:t>Shivam Mulani, Gurshaan Nandrajog, Harshvarddhan Waghela, B.Tech.(Comp.)</a:t>
             </a:r>
             <a:endParaRPr b="0" lang="en-US" sz="2400" spc="-1" strike="noStrike">
               <a:solidFill>
@@ -1433,7 +1433,7 @@
                 <a:latin typeface="Bookman Old Style"/>
                 <a:ea typeface="Times New Roman"/>
               </a:rPr>
-              <a:t>Project Guide: Prof. Guide Name  |  Group No. 86</a:t>
+              <a:t>Project Guide: Prof. Anant Nimkar  |  Group No. 86</a:t>
             </a:r>
             <a:endParaRPr b="0" lang="en-US" sz="2400" spc="-1" strike="noStrike">
               <a:solidFill>

--- a/report/86_Dynamic_Timetable_Monitoring_System/poster/86_Dynamic_Timetable_Poster.pptx
+++ b/report/86_Dynamic_Timetable_Monitoring_System/poster/86_Dynamic_Timetable_Poster.pptx
@@ -2345,7 +2345,7 @@
                 <a:latin typeface="Bookman Old Style"/>
                 <a:ea typeface="Times New Roman"/>
               </a:rPr>
-              <a:t>• Question engine without generated SQL: 30 intents → 22 safe templates</a:t>
+              <a:t>• Compositional query planner: question → typed plan → safe SQL (no fixed question list)</a:t>
             </a:r>
             <a:endParaRPr b="0" lang="en-US" sz="1600" spc="-1" strike="noStrike">
               <a:solidFill>
@@ -3398,7 +3398,7 @@
                 <a:latin typeface="Bookman Old Style"/>
                 <a:ea typeface="Times New Roman"/>
               </a:rPr>
-              <a:t>5. Question → 1 of 30 intents → clarify if ambiguous → 1 of 22 safe queries.</a:t>
+              <a:t>5. Question → query plan (count/first/last/per-day + filters) → clarify if ambiguous → safe SQL.</a:t>
             </a:r>
             <a:endParaRPr b="0" lang="en-US" sz="1600" spc="-1" strike="noStrike">
               <a:solidFill>
@@ -4067,7 +4067,7 @@
                 <a:latin typeface="Bookman Old Style"/>
                 <a:ea typeface="Times New Roman"/>
               </a:rPr>
-              <a:t>• 10-page PDF extracted in 1.65 s; 159 + 18 automated tests and end-to-end tests pass</a:t>
+              <a:t>• 10-page PDF extracted in 1.65 s; 168 + 20 automated tests and end-to-end tests pass</a:t>
             </a:r>
             <a:endParaRPr b="0" lang="en-US" sz="1600" spc="-1" strike="noStrike">
               <a:solidFill>
@@ -5143,7 +5143,7 @@
         <p:spPr>
           <a:xfrm>
             <a:off x="566928" y="18589752"/>
-            <a:ext cx="4572000" cy="2550059"/>
+            <a:ext cx="4572000" cy="2581296"/>
           </a:xfrm>
           <a:prstGeom prst="rect">
             <a:avLst/>

--- a/report/86_Dynamic_Timetable_Monitoring_System/poster/86_Dynamic_Timetable_Poster.pptx
+++ b/report/86_Dynamic_Timetable_Monitoring_System/poster/86_Dynamic_Timetable_Poster.pptx
@@ -4067,7 +4067,7 @@
                 <a:latin typeface="Bookman Old Style"/>
                 <a:ea typeface="Times New Roman"/>
               </a:rPr>
-              <a:t>• 10-page PDF extracted in 1.65 s; 168 + 20 automated tests and end-to-end tests pass</a:t>
+              <a:t>• 10-page PDF extracted in 1.65 s; 174 + 20 automated tests and end-to-end tests pass</a:t>
             </a:r>
             <a:endParaRPr b="0" lang="en-US" sz="1600" spc="-1" strike="noStrike">
               <a:solidFill>

--- a/report/86_Dynamic_Timetable_Monitoring_System/poster/86_Dynamic_Timetable_Poster.pptx
+++ b/report/86_Dynamic_Timetable_Monitoring_System/poster/86_Dynamic_Timetable_Poster.pptx
@@ -4067,7 +4067,7 @@
                 <a:latin typeface="Bookman Old Style"/>
                 <a:ea typeface="Times New Roman"/>
               </a:rPr>
-              <a:t>• 10-page PDF extracted in 1.65 s; 174 + 20 automated tests and end-to-end tests pass</a:t>
+              <a:t>• 10-page PDF extracted in 1.65 s; 178 + 20 automated tests and end-to-end tests pass</a:t>
             </a:r>
             <a:endParaRPr b="0" lang="en-US" sz="1600" spc="-1" strike="noStrike">
               <a:solidFill>
